--- a/EXL_Vaibhav_Bansal_One_Pager.pptx
+++ b/EXL_Vaibhav_Bansal_One_Pager.pptx
@@ -161,23 +161,39 @@
 <pc:chgInfo xmlns:a="http://schemas.openxmlformats.org/drawingml/2006/main" xmlns:r="http://schemas.openxmlformats.org/officeDocument/2006/relationships" xmlns:ac="http://schemas.microsoft.com/office/drawing/2013/main/command" xmlns:pc="http://schemas.microsoft.com/office/powerpoint/2013/main/command">
   <pc:docChgLst>
     <pc:chgData name="Vaibhav Bansal" userId="5c323ea5-97f9-4a29-8e3a-8b8f7979b3ee" providerId="ADAL" clId="{7F9736A4-A4C0-4FAC-B624-8A5D6FCA1F38}"/>
-    <pc:docChg chg="modSld">
-      <pc:chgData name="Vaibhav Bansal" userId="5c323ea5-97f9-4a29-8e3a-8b8f7979b3ee" providerId="ADAL" clId="{7F9736A4-A4C0-4FAC-B624-8A5D6FCA1F38}" dt="2026-08-17T18:04:19.257" v="12" actId="20577"/>
+    <pc:docChg chg="undo custSel modSld">
+      <pc:chgData name="Vaibhav Bansal" userId="5c323ea5-97f9-4a29-8e3a-8b8f7979b3ee" providerId="ADAL" clId="{7F9736A4-A4C0-4FAC-B624-8A5D6FCA1F38}" dt="2026-08-18T08:35:04.836" v="18" actId="20577"/>
       <pc:docMkLst>
         <pc:docMk/>
       </pc:docMkLst>
       <pc:sldChg chg="modSp mod">
-        <pc:chgData name="Vaibhav Bansal" userId="5c323ea5-97f9-4a29-8e3a-8b8f7979b3ee" providerId="ADAL" clId="{7F9736A4-A4C0-4FAC-B624-8A5D6FCA1F38}" dt="2026-08-17T18:04:19.257" v="12" actId="20577"/>
+        <pc:chgData name="Vaibhav Bansal" userId="5c323ea5-97f9-4a29-8e3a-8b8f7979b3ee" providerId="ADAL" clId="{7F9736A4-A4C0-4FAC-B624-8A5D6FCA1F38}" dt="2026-08-18T08:35:04.836" v="18" actId="20577"/>
         <pc:sldMkLst>
           <pc:docMk/>
           <pc:sldMk cId="1107068283" sldId="385"/>
         </pc:sldMkLst>
+        <pc:spChg chg="mod">
+          <ac:chgData name="Vaibhav Bansal" userId="5c323ea5-97f9-4a29-8e3a-8b8f7979b3ee" providerId="ADAL" clId="{7F9736A4-A4C0-4FAC-B624-8A5D6FCA1F38}" dt="2026-08-18T08:35:04.836" v="18" actId="20577"/>
+          <ac:spMkLst>
+            <pc:docMk/>
+            <pc:sldMk cId="1107068283" sldId="385"/>
+            <ac:spMk id="24" creationId="{AEE13719-115D-3445-29FC-3DDCC8C3FBD6}"/>
+          </ac:spMkLst>
+        </pc:spChg>
         <pc:spChg chg="mod">
           <ac:chgData name="Vaibhav Bansal" userId="5c323ea5-97f9-4a29-8e3a-8b8f7979b3ee" providerId="ADAL" clId="{7F9736A4-A4C0-4FAC-B624-8A5D6FCA1F38}" dt="2026-08-17T18:04:19.257" v="12" actId="20577"/>
           <ac:spMkLst>
             <pc:docMk/>
             <pc:sldMk cId="1107068283" sldId="385"/>
             <ac:spMk id="30" creationId="{4D3CE9DB-5C39-F736-D2BA-6D77BF4C8686}"/>
+          </ac:spMkLst>
+        </pc:spChg>
+        <pc:spChg chg="mod">
+          <ac:chgData name="Vaibhav Bansal" userId="5c323ea5-97f9-4a29-8e3a-8b8f7979b3ee" providerId="ADAL" clId="{7F9736A4-A4C0-4FAC-B624-8A5D6FCA1F38}" dt="2026-08-18T08:34:35.306" v="13" actId="20577"/>
+          <ac:spMkLst>
+            <pc:docMk/>
+            <pc:sldMk cId="1107068283" sldId="385"/>
+            <ac:spMk id="32" creationId="{BC3C72E5-F705-7C1B-C400-ECBC2726DF82}"/>
           </ac:spMkLst>
         </pc:spChg>
       </pc:sldChg>
@@ -268,7 +284,7 @@
           <a:p>
             <a:fld id="{BC4D9FB6-F063-5E4C-8E15-DE2BAD5FDB90}" type="datetimeFigureOut">
               <a:rPr lang="en-US" smtClean="0"/>
-              <a:t>8/17/2026</a:t>
+              <a:t>8/18/2026</a:t>
             </a:fld>
             <a:endParaRPr lang="en-US" dirty="0"/>
           </a:p>
@@ -16465,7 +16481,7 @@
           <a:p>
             <a:fld id="{0CCCACD6-8279-7A43-AFDE-A51255A0F160}" type="datetime1">
               <a:rPr lang="en-US" smtClean="0"/>
-              <a:t>8/17/2026</a:t>
+              <a:t>8/18/2026</a:t>
             </a:fld>
             <a:endParaRPr lang="en-US" dirty="0"/>
           </a:p>
@@ -17673,7 +17689,25 @@
                 </a:solidFill>
                 <a:latin typeface="+mj-lt"/>
               </a:rPr>
-              <a:t>Results-driven Analytics &amp; AI Consultant with 6+ years of experience delivering data-driven and AI-powered solutions across analytics, business intelligence, and Generative AI. Proficient in Python, SQL, PostgreSQL, Vertex AI, and Gemini, with expertise in data science, machine learning, RAG-based conversational AI, and enterprise knowledge retrieval. Experienced in transforming complex data into actionable insights and building scalable AI solutions that enhance decision-making, operational efficiency, and business growth. Holds a Diploma in Data Science with a strong foundation in computer science and  advance analytics.</a:t>
+              <a:t>Results-driven Analytics &amp; AI Consultant with 6+ years of experience delivering data-driven and AI-powered solutions across analytics, business intelligence, and Generative AI. Proficient in Python, SQL, PostgreSQL, Vertex AI, and Gemini, with expertise in data science, machine learning, RAG - based </a:t>
+            </a:r>
+            <a:r>
+              <a:rPr lang="en-US" sz="1400">
+                <a:solidFill>
+                  <a:schemeClr val="tx2"/>
+                </a:solidFill>
+                <a:latin typeface="+mj-lt"/>
+              </a:rPr>
+              <a:t>conversational AI </a:t>
+            </a:r>
+            <a:r>
+              <a:rPr lang="en-US" sz="1400" dirty="0">
+                <a:solidFill>
+                  <a:schemeClr val="tx2"/>
+                </a:solidFill>
+                <a:latin typeface="+mj-lt"/>
+              </a:rPr>
+              <a:t>and enterprise knowledge retrieval. Experienced in transforming complex data into actionable insights and building scalable AI solutions that enhance decision-making, operational efficiency, and business growth. Holds a Diploma in Data Science with a strong foundation in computer science and  advance analytics.</a:t>
             </a:r>
             <a:br>
               <a:rPr lang="en-US" sz="1400" dirty="0">
@@ -18228,7 +18262,7 @@
                 <a:latin typeface="+mj-lt"/>
                 <a:cs typeface="Calibri Light"/>
               </a:rPr>
-              <a:t>: Domo ,Power Automate, Vertex AI, Advance Excel</a:t>
+              <a:t>: Domo , Power Automate, Vertex AI, Advance Excel</a:t>
             </a:r>
           </a:p>
           <a:p>
@@ -19190,6 +19224,26 @@
 </file>
 
 <file path=customXml/item1.xml><?xml version="1.0" encoding="utf-8"?>
+<?mso-contentType ?>
+<FormTemplates xmlns="http://schemas.microsoft.com/sharepoint/v3/contenttype/forms">
+  <Display>DocumentLibraryForm</Display>
+  <Edit>DocumentLibraryForm</Edit>
+  <New>DocumentLibraryForm</New>
+</FormTemplates>
+</file>
+
+<file path=customXml/item2.xml><?xml version="1.0" encoding="utf-8"?>
+<p:properties xmlns:p="http://schemas.microsoft.com/office/2006/metadata/properties" xmlns:xsi="http://www.w3.org/2001/XMLSchema-instance" xmlns:pc="http://schemas.microsoft.com/office/infopath/2007/PartnerControls">
+  <documentManagement>
+    <TaxCatchAll xmlns="40e384aa-b4d0-4f78-a429-a8d988b5dec2"/>
+    <lcf76f155ced4ddcb4097134ff3c332f xmlns="8dea0e01-13cf-4558-90d2-91da66b81ad9">
+      <Terms xmlns="http://schemas.microsoft.com/office/infopath/2007/PartnerControls"/>
+    </lcf76f155ced4ddcb4097134ff3c332f>
+  </documentManagement>
+</p:properties>
+</file>
+
+<file path=customXml/item3.xml><?xml version="1.0" encoding="utf-8"?>
 <ct:contentTypeSchema xmlns:ct="http://schemas.microsoft.com/office/2006/metadata/contentType" xmlns:ma="http://schemas.microsoft.com/office/2006/metadata/properties/metaAttributes" ct:_="" ma:_="" ma:contentTypeName="Document" ma:contentTypeID="0x0101006C94A73D6D76BB488C9601ABB843B24C" ma:contentTypeVersion="11" ma:contentTypeDescription="Create a new document." ma:contentTypeScope="" ma:versionID="72115843fe0036120e49d2ee8337d282">
   <xsd:schema xmlns:xsd="http://www.w3.org/2001/XMLSchema" xmlns:xs="http://www.w3.org/2001/XMLSchema" xmlns:p="http://schemas.microsoft.com/office/2006/metadata/properties" xmlns:ns2="8dea0e01-13cf-4558-90d2-91da66b81ad9" xmlns:ns3="40e384aa-b4d0-4f78-a429-a8d988b5dec2" targetNamespace="http://schemas.microsoft.com/office/2006/metadata/properties" ma:root="true" ma:fieldsID="0d6cbcc510faff023e7db73fb1640fa9" ns2:_="" ns3:_="">
     <xsd:import namespace="8dea0e01-13cf-4558-90d2-91da66b81ad9"/>
@@ -19398,41 +19452,10 @@
 </ct:contentTypeSchema>
 </file>
 
-<file path=customXml/item2.xml><?xml version="1.0" encoding="utf-8"?>
-<p:properties xmlns:p="http://schemas.microsoft.com/office/2006/metadata/properties" xmlns:xsi="http://www.w3.org/2001/XMLSchema-instance" xmlns:pc="http://schemas.microsoft.com/office/infopath/2007/PartnerControls">
-  <documentManagement>
-    <TaxCatchAll xmlns="40e384aa-b4d0-4f78-a429-a8d988b5dec2"/>
-    <lcf76f155ced4ddcb4097134ff3c332f xmlns="8dea0e01-13cf-4558-90d2-91da66b81ad9">
-      <Terms xmlns="http://schemas.microsoft.com/office/infopath/2007/PartnerControls"/>
-    </lcf76f155ced4ddcb4097134ff3c332f>
-  </documentManagement>
-</p:properties>
-</file>
-
-<file path=customXml/item3.xml><?xml version="1.0" encoding="utf-8"?>
-<?mso-contentType ?>
-<FormTemplates xmlns="http://schemas.microsoft.com/sharepoint/v3/contenttype/forms">
-  <Display>DocumentLibraryForm</Display>
-  <Edit>DocumentLibraryForm</Edit>
-  <New>DocumentLibraryForm</New>
-</FormTemplates>
-</file>
-
 <file path=customXml/itemProps1.xml><?xml version="1.0" encoding="utf-8"?>
-<ds:datastoreItem xmlns:ds="http://schemas.openxmlformats.org/officeDocument/2006/customXml" ds:itemID="{3CD1A0A4-7784-4B27-851F-363BE13A55B4}">
+<ds:datastoreItem xmlns:ds="http://schemas.openxmlformats.org/officeDocument/2006/customXml" ds:itemID="{ED06EA39-5B2B-4777-A9B9-78C6DF56D153}">
   <ds:schemaRefs>
-    <ds:schemaRef ds:uri="http://schemas.microsoft.com/office/2006/metadata/contentType"/>
-    <ds:schemaRef ds:uri="http://schemas.microsoft.com/office/2006/metadata/properties/metaAttributes"/>
-    <ds:schemaRef ds:uri="http://www.w3.org/2001/XMLSchema"/>
-    <ds:schemaRef ds:uri="http://schemas.microsoft.com/office/2006/metadata/properties"/>
-    <ds:schemaRef ds:uri="8dea0e01-13cf-4558-90d2-91da66b81ad9"/>
-    <ds:schemaRef ds:uri="40e384aa-b4d0-4f78-a429-a8d988b5dec2"/>
-    <ds:schemaRef ds:uri="http://schemas.microsoft.com/office/2006/documentManagement/types"/>
-    <ds:schemaRef ds:uri="http://schemas.microsoft.com/office/infopath/2007/PartnerControls"/>
-    <ds:schemaRef ds:uri="http://schemas.openxmlformats.org/package/2006/metadata/core-properties"/>
-    <ds:schemaRef ds:uri="http://purl.org/dc/elements/1.1/"/>
-    <ds:schemaRef ds:uri="http://purl.org/dc/terms/"/>
-    <ds:schemaRef ds:uri="http://schemas.microsoft.com/internal/obd"/>
+    <ds:schemaRef ds:uri="http://schemas.microsoft.com/sharepoint/v3/contenttype/forms"/>
   </ds:schemaRefs>
 </ds:datastoreItem>
 </file>
@@ -19455,9 +19478,20 @@
 </file>
 
 <file path=customXml/itemProps3.xml><?xml version="1.0" encoding="utf-8"?>
-<ds:datastoreItem xmlns:ds="http://schemas.openxmlformats.org/officeDocument/2006/customXml" ds:itemID="{ED06EA39-5B2B-4777-A9B9-78C6DF56D153}">
+<ds:datastoreItem xmlns:ds="http://schemas.openxmlformats.org/officeDocument/2006/customXml" ds:itemID="{3CD1A0A4-7784-4B27-851F-363BE13A55B4}">
   <ds:schemaRefs>
-    <ds:schemaRef ds:uri="http://schemas.microsoft.com/sharepoint/v3/contenttype/forms"/>
+    <ds:schemaRef ds:uri="http://schemas.microsoft.com/office/2006/metadata/contentType"/>
+    <ds:schemaRef ds:uri="http://schemas.microsoft.com/office/2006/metadata/properties/metaAttributes"/>
+    <ds:schemaRef ds:uri="http://www.w3.org/2001/XMLSchema"/>
+    <ds:schemaRef ds:uri="http://schemas.microsoft.com/office/2006/metadata/properties"/>
+    <ds:schemaRef ds:uri="8dea0e01-13cf-4558-90d2-91da66b81ad9"/>
+    <ds:schemaRef ds:uri="40e384aa-b4d0-4f78-a429-a8d988b5dec2"/>
+    <ds:schemaRef ds:uri="http://schemas.microsoft.com/office/2006/documentManagement/types"/>
+    <ds:schemaRef ds:uri="http://schemas.microsoft.com/office/infopath/2007/PartnerControls"/>
+    <ds:schemaRef ds:uri="http://schemas.openxmlformats.org/package/2006/metadata/core-properties"/>
+    <ds:schemaRef ds:uri="http://purl.org/dc/elements/1.1/"/>
+    <ds:schemaRef ds:uri="http://purl.org/dc/terms/"/>
+    <ds:schemaRef ds:uri="http://schemas.microsoft.com/internal/obd"/>
   </ds:schemaRefs>
 </ds:datastoreItem>
 </file>